--- a/presentation.pptx
+++ b/presentation.pptx
@@ -13971,7 +13971,7 @@
                 <a:latin typeface="Arial"/>
                 <a:ea typeface="Arial"/>
               </a:rPr>
-              <a:t> and creates the DeepSeek client (</a:t>
+              <a:t> and creates the local Qwen3 client (</a:t>
             </a:r>
             <a:r>
               <a:rPr lang="en-US" sz="1100" b="0" u="none" strike="noStrike">
@@ -15252,7 +15252,7 @@
                 <a:latin typeface="Arial"/>
                 <a:ea typeface="Arial"/>
               </a:rPr>
-              <a:t>LOADS: chroma_db/ vector store (local) + creates a DeepSeek client (internet)</a:t>
+              <a:t>LOADS: chroma_db/ vector store (local) + creates a local Qwen3 client (llama.cpp)</a:t>
             </a:r>
             <a:endParaRPr lang="en-US" sz="1350" b="0" u="none" strike="noStrike">
               <a:solidFill>
@@ -15282,7 +15282,7 @@
                 <a:latin typeface="Arial"/>
                 <a:ea typeface="Arial"/>
               </a:rPr>
-              <a:t>•  Needs </a:t>
+              <a:t>•  No API key needed — </a:t>
             </a:r>
             <a:r>
               <a:rPr lang="en-US" sz="1100" b="0" u="none" strike="noStrike">
@@ -15294,19 +15294,19 @@
                 <a:latin typeface="Consolas"/>
                 <a:ea typeface="Consolas"/>
               </a:rPr>
-              <a:t>DEEPSEEK_API_KEY</a:t>
-            </a:r>
-            <a:r>
-              <a:rPr lang="en-US" sz="1200" b="0" u="none" strike="noStrike">
-                <a:solidFill>
-                  <a:srgbClr val="1A1A1A"/>
-                </a:solidFill>
-                <a:effectLst/>
-                <a:uFillTx/>
-                <a:latin typeface="Arial"/>
-                <a:ea typeface="Arial"/>
-              </a:rPr>
-              <a:t>. If missing, the tab shows a warning instead.</a:t>
+              <a:t>Qwen3-Coder-Next</a:t>
+            </a:r>
+            <a:r>
+              <a:rPr lang="en-US" sz="1200" b="0" u="none" strike="noStrike">
+                <a:solidFill>
+                  <a:srgbClr val="1A1A1A"/>
+                </a:solidFill>
+                <a:effectLst/>
+                <a:uFillTx/>
+                <a:latin typeface="Arial"/>
+                <a:ea typeface="Arial"/>
+              </a:rPr>
+              <a:t> runs locally via llama.cpp.</a:t>
             </a:r>
             <a:endParaRPr lang="en-US" sz="1200" b="0" u="none" strike="noStrike">
               <a:solidFill>
@@ -15633,7 +15633,7 @@
                 <a:latin typeface="Arial"/>
                 <a:ea typeface="Arial"/>
               </a:rPr>
-              <a:t>over the internet to DeepSeek's API</a:t>
+              <a:t>locally to the Qwen3-Coder-Next model</a:t>
             </a:r>
             <a:r>
               <a:rPr lang="en-US" sz="1200" b="0" u="none" strike="noStrike">
@@ -15657,7 +15657,7 @@
                 <a:latin typeface="Consolas"/>
                 <a:ea typeface="Consolas"/>
               </a:rPr>
-              <a:t>https://api.deepseek.com</a:t>
+              <a:t>http://localhost:8080/v1</a:t>
             </a:r>
             <a:r>
               <a:rPr lang="en-US" sz="1200" b="0" u="none" strike="noStrike">
@@ -15681,7 +15681,7 @@
                 <a:latin typeface="Consolas"/>
                 <a:ea typeface="Consolas"/>
               </a:rPr>
-              <a:t>deepseek-chat</a:t>
+              <a:t>qwen3-coder-next</a:t>
             </a:r>
             <a:r>
               <a:rPr lang="en-US" sz="1200" b="0" u="none" strike="noStrike">
@@ -15882,7 +15882,7 @@
                 <a:latin typeface="Arial"/>
                 <a:ea typeface="Arial"/>
               </a:rPr>
-              <a:t>So: the memory is local, the intelligence is on the internet. No data ever leaves your machine except the question + the 5 text chunks.</a:t>
+              <a:t>So: everything is local — the memory AND the intelligence (Qwen3). No data ever leaves your machine.</a:t>
             </a:r>
             <a:endParaRPr lang="en-US" sz="1050" b="0" u="none" strike="noStrike">
               <a:solidFill>
@@ -16295,7 +16295,7 @@
                 <a:latin typeface="Arial"/>
                 <a:ea typeface="Arial"/>
               </a:rPr>
-              <a:t>DeepSeek client.</a:t>
+              <a:t>Qwen3 client (local).</a:t>
             </a:r>
             <a:endParaRPr lang="en-US" sz="1200" b="0" u="none" strike="noStrike">
               <a:solidFill>
@@ -16397,7 +16397,7 @@
                 <a:latin typeface="Arial"/>
                 <a:ea typeface="Arial"/>
               </a:rPr>
-              <a:t>DeepSeek → return </a:t>
+              <a:t>Qwen3 → return </a:t>
             </a:r>
             <a:r>
               <a:rPr lang="en-US" sz="1100" b="0" u="none" strike="noStrike">
@@ -16796,7 +16796,7 @@
                 <a:latin typeface="Arial"/>
                 <a:ea typeface="Arial"/>
               </a:rPr>
-              <a:t>•  DeepSeek is called </a:t>
+              <a:t>•  Qwen3 is called </a:t>
             </a:r>
             <a:r>
               <a:rPr lang="en-US" sz="1200" b="0" u="none" strike="noStrike">
@@ -18789,19 +18789,19 @@
                 <a:latin typeface="Arial"/>
                 <a:ea typeface="Arial"/>
               </a:rPr>
-              <a:t>internet</a:t>
-            </a:r>
-            <a:r>
-              <a:rPr lang="en-US" sz="1200" b="0" u="none" strike="noStrike">
-                <a:solidFill>
-                  <a:srgbClr val="1A1A1A"/>
-                </a:solidFill>
-                <a:effectLst/>
-                <a:uFillTx/>
-                <a:latin typeface="Arial"/>
-                <a:ea typeface="Arial"/>
-              </a:rPr>
-              <a:t> (DeepSeek + </a:t>
+              <a:t>internet and a local model</a:t>
+            </a:r>
+            <a:r>
+              <a:rPr lang="en-US" sz="1200" b="0" u="none" strike="noStrike">
+                <a:solidFill>
+                  <a:srgbClr val="1A1A1A"/>
+                </a:solidFill>
+                <a:effectLst/>
+                <a:uFillTx/>
+                <a:latin typeface="Arial"/>
+                <a:ea typeface="Arial"/>
+              </a:rPr>
+              <a:t> (Qwen3 + </a:t>
             </a:r>
             <a:r>
               <a:rPr lang="en-US" sz="1200" b="0" u="none" strike="noStrike">
@@ -27574,7 +27574,7 @@
                 <a:latin typeface="Arial"/>
                 <a:ea typeface="Arial"/>
               </a:rPr>
-              <a:t>) with the internet brain (DeepSeek API) to answer career questions. Read-only for files.</a:t>
+              <a:t>) with the local brain (Qwen3, llama.cpp) to answer career questions. Read-only for files.</a:t>
             </a:r>
             <a:endParaRPr lang="en-US" sz="1200" b="0" u="none" strike="noStrike">
               <a:solidFill>
@@ -28224,7 +28224,7 @@
                 <a:latin typeface="Arial"/>
                 <a:ea typeface="Arial"/>
               </a:rPr>
-              <a:t>INTERNET — three services + your email, all via API keys in .env</a:t>
+              <a:t>INTERNET — two online services + your email, all via API keys in .env</a:t>
             </a:r>
             <a:endParaRPr lang="en-US" sz="1350" b="0" u="none" strike="noStrike">
               <a:solidFill>
@@ -28320,7 +28320,7 @@
                 <a:latin typeface="Arial"/>
                 <a:ea typeface="Arial"/>
               </a:rPr>
-              <a:t>DeepSeek</a:t>
+              <a:t>Qwen3</a:t>
             </a:r>
             <a:r>
               <a:rPr lang="en-US" sz="1200" b="0" u="none" strike="noStrike">
@@ -28344,19 +28344,19 @@
                 <a:latin typeface="Consolas"/>
                 <a:ea typeface="Consolas"/>
               </a:rPr>
-              <a:t>DEEPSEEK_API_KEY</a:t>
-            </a:r>
-            <a:r>
-              <a:rPr lang="en-US" sz="1200" b="0" u="none" strike="noStrike">
-                <a:solidFill>
-                  <a:srgbClr val="1A1A1A"/>
-                </a:solidFill>
-                <a:effectLst/>
-                <a:uFillTx/>
-                <a:latin typeface="Arial"/>
-                <a:ea typeface="Arial"/>
-              </a:rPr>
-              <a:t>) — the AI brain for Tab 3.</a:t>
+              <a:t>local, no API key</a:t>
+            </a:r>
+            <a:r>
+              <a:rPr lang="en-US" sz="1200" b="0" u="none" strike="noStrike">
+                <a:solidFill>
+                  <a:srgbClr val="1A1A1A"/>
+                </a:solidFill>
+                <a:effectLst/>
+                <a:uFillTx/>
+                <a:latin typeface="Arial"/>
+                <a:ea typeface="Arial"/>
+              </a:rPr>
+              <a:t>) — the AI brain for Tab 3 (llama.cpp).</a:t>
             </a:r>
             <a:endParaRPr lang="en-US" sz="1200" b="0" u="none" strike="noStrike">
               <a:solidFill>
@@ -28946,7 +28946,7 @@
                 <a:latin typeface="Consolas"/>
                 <a:ea typeface="Consolas"/>
               </a:rPr>
-              <a:t>  reads  chroma_db/  +  calls DeepSeek   -&gt;  Tab 3 (AI Career Coach)</a:t>
+              <a:t>  reads  chroma_db/  +  local Qwen3 (no API key)   -&gt;  Tab 3 (AI Career Coach)</a:t>
             </a:r>
             <a:endParaRPr lang="en-US" sz="1000" b="0" u="none" strike="noStrike">
               <a:solidFill>

--- a/presentation.pptx
+++ b/presentation.pptx
@@ -12432,30 +12432,9 @@
                       <a:noAutofit/>
                     </a:bodyPr>
                     <a:p>
-                      <a:pPr>
-                        <a:lnSpc>
-                          <a:spcPct val="100000"/>
-                        </a:lnSpc>
-                      </a:pPr>
                       <a:r>
-                        <a:rPr lang="en-US" sz="950" b="0" u="none" strike="noStrike">
-                          <a:solidFill>
-                            <a:srgbClr val="1A1A1A"/>
-                          </a:solidFill>
-                          <a:effectLst/>
-                          <a:uFillTx/>
-                          <a:latin typeface="Consolas"/>
-                        </a:rPr>
-                        <a:t>deepseek-chat (DeepSeek)</a:t>
+                        <a:t>Qwen3-Coder-Next (qwen3-coder-next)</a:t>
                       </a:r>
-                      <a:endParaRPr lang="en-US" sz="950" b="0" u="none" strike="noStrike">
-                        <a:solidFill>
-                          <a:srgbClr val="000000"/>
-                        </a:solidFill>
-                        <a:effectLst/>
-                        <a:uFillTx/>
-                        <a:latin typeface="Times New Roman"/>
-                      </a:endParaRPr>
                     </a:p>
                   </a:txBody>
                   <a:tcPr anchor="ctr" marL="54720" marR="54720" marT="27360" marB="27360">
@@ -12556,30 +12535,9 @@
                       <a:noAutofit/>
                     </a:bodyPr>
                     <a:p>
-                      <a:pPr>
-                        <a:lnSpc>
-                          <a:spcPct val="100000"/>
-                        </a:lnSpc>
-                      </a:pPr>
                       <a:r>
-                        <a:rPr lang="en-US" sz="950" b="0" u="none" strike="noStrike">
-                          <a:solidFill>
-                            <a:srgbClr val="1A1A1A"/>
-                          </a:solidFill>
-                          <a:effectLst/>
-                          <a:uFillTx/>
-                          <a:latin typeface="Arial"/>
-                        </a:rPr>
-                        <a:t>Remote API over the internet (cloud; key in .env)</a:t>
+                        <a:t>Runs locally via llama.cpp (llama-server on :8080) — no API key</a:t>
                       </a:r>
-                      <a:endParaRPr lang="en-US" sz="950" b="0" u="none" strike="noStrike">
-                        <a:solidFill>
-                          <a:srgbClr val="000000"/>
-                        </a:solidFill>
-                        <a:effectLst/>
-                        <a:uFillTx/>
-                        <a:latin typeface="Times New Roman"/>
-                      </a:endParaRPr>
                     </a:p>
                   </a:txBody>
                   <a:tcPr anchor="ctr" marL="54720" marR="54720" marT="27360" marB="27360">
@@ -13051,7 +13009,7 @@
                 <a:uFillTx/>
                 <a:latin typeface="Arial"/>
               </a:rPr>
-              <a:t>the LLM and the search are REMOTE APIs — the website never downloads or runs a big model file.</a:t>
+              <a:t>the LLM now runs LOCALLY via llama.cpp (no API key) — the website never downloads a model file; only the search is a remote API.</a:t>
             </a:r>
             <a:endParaRPr lang="en-US" sz="1050" b="0" u="none" strike="noStrike">
               <a:solidFill>
@@ -14172,7 +14130,7 @@
                 <a:latin typeface="Arial"/>
                 <a:ea typeface="Arial"/>
               </a:rPr>
-              <a:t>, and returns the API configs (</a:t>
+              <a:t>, and returns the model &amp; search configs</a:t>
             </a:r>
             <a:r>
               <a:rPr lang="en-US" sz="1100" b="0" u="none" strike="noStrike">
@@ -14184,19 +14142,19 @@
                 <a:latin typeface="Consolas"/>
                 <a:ea typeface="Consolas"/>
               </a:rPr>
-              <a:t>get_deepseek_config()</a:t>
-            </a:r>
-            <a:r>
-              <a:rPr lang="en-US" sz="1200" b="0" u="none" strike="noStrike">
-                <a:solidFill>
-                  <a:srgbClr val="1A1A1A"/>
-                </a:solidFill>
-                <a:effectLst/>
-                <a:uFillTx/>
-                <a:latin typeface="Arial"/>
-                <a:ea typeface="Arial"/>
-              </a:rPr>
-              <a:t>, </a:t>
+              <a:t> (from .env)</a:t>
+            </a:r>
+            <a:r>
+              <a:rPr lang="en-US" sz="1200" b="0" u="none" strike="noStrike">
+                <a:solidFill>
+                  <a:srgbClr val="1A1A1A"/>
+                </a:solidFill>
+                <a:effectLst/>
+                <a:uFillTx/>
+                <a:latin typeface="Arial"/>
+                <a:ea typeface="Arial"/>
+              </a:rPr>
+              <a:t/>
             </a:r>
             <a:r>
               <a:rPr lang="en-US" sz="1100" b="0" u="none" strike="noStrike">
@@ -14208,19 +14166,19 @@
                 <a:latin typeface="Consolas"/>
                 <a:ea typeface="Consolas"/>
               </a:rPr>
-              <a:t>get_tavily_config()</a:t>
-            </a:r>
-            <a:r>
-              <a:rPr lang="en-US" sz="1200" b="0" u="none" strike="noStrike">
-                <a:solidFill>
-                  <a:srgbClr val="1A1A1A"/>
-                </a:solidFill>
-                <a:effectLst/>
-                <a:uFillTx/>
-                <a:latin typeface="Arial"/>
-                <a:ea typeface="Arial"/>
-              </a:rPr>
-              <a:t>).</a:t>
+              <a:t/>
+            </a:r>
+            <a:r>
+              <a:rPr lang="en-US" sz="1200" b="0" u="none" strike="noStrike">
+                <a:solidFill>
+                  <a:srgbClr val="1A1A1A"/>
+                </a:solidFill>
+                <a:effectLst/>
+                <a:uFillTx/>
+                <a:latin typeface="Arial"/>
+                <a:ea typeface="Arial"/>
+              </a:rPr>
+              <a:t>.</a:t>
             </a:r>
             <a:endParaRPr lang="en-US" sz="1200" b="0" u="none" strike="noStrike">
               <a:solidFill>
@@ -23140,7 +23098,7 @@
                 <a:latin typeface="Consolas"/>
                 <a:ea typeface="Consolas"/>
               </a:rPr>
-              <a:t>missing API key in .env       -&gt;  Tab 3 or 4 shows a warning; rest still works</a:t>
+              <a:t>missing TAVILY_API_KEY       -&gt;  Tab 4 shows a warning; rest still works (Tab 3 AI is local — no key needed)</a:t>
             </a:r>
             <a:endParaRPr lang="en-US" sz="1000" b="0" u="none" strike="noStrike">
               <a:solidFill>
@@ -25789,31 +25747,9 @@
                       <a:noAutofit/>
                     </a:bodyPr>
                     <a:p>
-                      <a:pPr defTabSz="457200">
-                        <a:lnSpc>
-                          <a:spcPct val="100000"/>
-                        </a:lnSpc>
-                      </a:pPr>
                       <a:r>
-                        <a:rPr lang="en-US" sz="950" b="0" u="none" strike="noStrike">
-                          <a:solidFill>
-                            <a:srgbClr val="1A1A1A"/>
-                          </a:solidFill>
-                          <a:effectLst/>
-                          <a:uFillTx/>
-                          <a:latin typeface="Arial"/>
-                          <a:ea typeface="Arial"/>
-                        </a:rPr>
-                        <a:t>chroma_db + DeepSeek API</a:t>
+                        <a:t>chroma_db + local Qwen3 (llama.cpp)</a:t>
                       </a:r>
-                      <a:endParaRPr lang="en-US" sz="950" b="0" u="none" strike="noStrike">
-                        <a:solidFill>
-                          <a:srgbClr val="000000"/>
-                        </a:solidFill>
-                        <a:effectLst/>
-                        <a:uFillTx/>
-                        <a:latin typeface="Arial"/>
-                      </a:endParaRPr>
                     </a:p>
                   </a:txBody>
                   <a:tcPr anchor="ctr" marL="54720" marR="54720" marT="27360" marB="27360">
@@ -30417,7 +30353,9 @@
                 <a:latin typeface="Consolas"/>
                 <a:ea typeface="Consolas"/>
               </a:rPr>
-              <a:t>DEEPSEEK_API_KEY=sk-...     # for the AI Career Coach  (https://platform.deepseek.com)</a:t>
+              <a:t>DEEPSEEK_API_KEY=local        # AI Coach: local Qwen3 via llama.cpp (no real key)
+DEEPSEEK_BASE_URL=http://localhost:8080/v1
+DEEPSEEK_MODEL=qwen3-coder-next</a:t>
             </a:r>
             <a:endParaRPr lang="en-US" sz="1000" b="0" u="none" strike="noStrike">
               <a:solidFill>
